--- a/Jueves-11/S01_Jueves-11_1_Carrusel_Poder-simple-vs-autenticado_4x5.pptx
+++ b/Jueves-11/S01_Jueves-11_1_Carrusel_Poder-simple-vs-autenticado_4x5.pptx
@@ -3663,7 +3663,7 @@
         </p:nvSpPr>
         <p:spPr>
           <a:xfrm>
-            <a:off x="777240" y="1761236"/>
+            <a:off x="777240" y="1280160"/>
             <a:ext cx="1371600" cy="146304"/>
           </a:xfrm>
           <a:prstGeom prst="rect">
@@ -3707,8 +3707,8 @@
         </p:nvSpPr>
         <p:spPr>
           <a:xfrm>
-            <a:off x="777240" y="2218436"/>
-            <a:ext cx="6675120" cy="5118608"/>
+            <a:off x="777240" y="1737360"/>
+            <a:ext cx="6675120" cy="6325108"/>
           </a:xfrm>
           <a:prstGeom prst="rect">
             <a:avLst/>
@@ -3733,7 +3733,7 @@
                 </a:solidFill>
                 <a:latin typeface="Inter"/>
               </a:rPr>
-              <a:t>Pronto te ayudamos a elegir bien.</a:t>
+              <a:t>En Notaly un abogado te ayuda a elegir bien.</a:t>
             </a:r>
           </a:p>
         </p:txBody>
@@ -3746,7 +3746,7 @@
         </p:nvSpPr>
         <p:spPr>
           <a:xfrm>
-            <a:off x="777240" y="7337044"/>
+            <a:off x="777240" y="7934452"/>
             <a:ext cx="6675120" cy="1118108"/>
           </a:xfrm>
           <a:prstGeom prst="rect">
@@ -3772,7 +3772,7 @@
                 </a:solidFill>
                 <a:latin typeface="Inter"/>
               </a:rPr>
-              <a:t>Síguenos, esto recién empieza.</a:t>
+              <a:t>Pruébalo: notaly.com.ve</a:t>
             </a:r>
           </a:p>
         </p:txBody>

--- a/Jueves-11/S01_Jueves-11_1_Carrusel_Poder-simple-vs-autenticado_4x5.pptx
+++ b/Jueves-11/S01_Jueves-11_1_Carrusel_Poder-simple-vs-autenticado_4x5.pptx
@@ -3772,7 +3772,7 @@
                 </a:solidFill>
                 <a:latin typeface="Inter"/>
               </a:rPr>
-              <a:t>Pruébalo: notaly.com.ve</a:t>
+              <a:t>Conócenos en notaly.com.ve</a:t>
             </a:r>
           </a:p>
         </p:txBody>

--- a/Jueves-11/S01_Jueves-11_1_Carrusel_Poder-simple-vs-autenticado_4x5.pptx
+++ b/Jueves-11/S01_Jueves-11_1_Carrusel_Poder-simple-vs-autenticado_4x5.pptx
@@ -3102,7 +3102,7 @@
       <p:grpSpPr/>
       <p:pic>
         <p:nvPicPr>
-          <p:cNvPr id="2" name="Picture 1" descr="firma.png"/>
+          <p:cNvPr id="2" name="Picture 1" descr="acta.png"/>
           <p:cNvPicPr>
             <a:picLocks noChangeAspect="1"/>
           </p:cNvPicPr>
